--- a/머신러닝-유형/AI-딥러닝을위한-수학공식.pptx
+++ b/머신러닝-유형/AI-딥러닝을위한-수학공식.pptx
@@ -5,7 +5,7 @@
     <p:sldMasterId id="2147483648" r:id="rId1"/>
   </p:sldMasterIdLst>
   <p:notesMasterIdLst>
-    <p:notesMasterId r:id="rId50"/>
+    <p:notesMasterId r:id="rId52"/>
   </p:notesMasterIdLst>
   <p:sldIdLst>
     <p:sldId id="256" r:id="rId2"/>
@@ -56,6 +56,8 @@
     <p:sldId id="381" r:id="rId47"/>
     <p:sldId id="382" r:id="rId48"/>
     <p:sldId id="383" r:id="rId49"/>
+    <p:sldId id="384" r:id="rId50"/>
+    <p:sldId id="385" r:id="rId51"/>
   </p:sldIdLst>
   <p:sldSz cx="12192000" cy="6858000"/>
   <p:notesSz cx="6858000" cy="9144000"/>
@@ -3553,6 +3555,222 @@
     <p:extLst>
       <p:ext uri="{BB962C8B-B14F-4D97-AF65-F5344CB8AC3E}">
         <p14:creationId xmlns:p14="http://schemas.microsoft.com/office/powerpoint/2010/main" val="3370232051"/>
+      </p:ext>
+    </p:extLst>
+  </p:cSld>
+  <p:clrMapOvr>
+    <a:masterClrMapping/>
+  </p:clrMapOvr>
+</p:notes>
+</file>
+
+<file path=ppt/notesSlides/notesSlide38.xml><?xml version="1.0" encoding="utf-8"?>
+<p:notes xmlns:a="http://schemas.openxmlformats.org/drawingml/2006/main" xmlns:r="http://schemas.openxmlformats.org/officeDocument/2006/relationships" xmlns:p="http://schemas.openxmlformats.org/presentationml/2006/main">
+  <p:cSld>
+    <p:spTree>
+      <p:nvGrpSpPr>
+        <p:cNvPr id="1" name="">
+          <a:extLst>
+            <a:ext uri="{FF2B5EF4-FFF2-40B4-BE49-F238E27FC236}">
+              <a16:creationId xmlns:a16="http://schemas.microsoft.com/office/drawing/2014/main" id="{1B4D6085-449E-CBDE-EEDE-040814D4D147}"/>
+            </a:ext>
+          </a:extLst>
+        </p:cNvPr>
+        <p:cNvGrpSpPr/>
+        <p:nvPr/>
+      </p:nvGrpSpPr>
+      <p:grpSpPr>
+        <a:xfrm>
+          <a:off x="0" y="0"/>
+          <a:ext cx="0" cy="0"/>
+          <a:chOff x="0" y="0"/>
+          <a:chExt cx="0" cy="0"/>
+        </a:xfrm>
+      </p:grpSpPr>
+      <p:sp>
+        <p:nvSpPr>
+          <p:cNvPr id="2" name="슬라이드 이미지 개체 틀 1">
+            <a:extLst>
+              <a:ext uri="{FF2B5EF4-FFF2-40B4-BE49-F238E27FC236}">
+                <a16:creationId xmlns:a16="http://schemas.microsoft.com/office/drawing/2014/main" id="{FDC8F58F-2B66-ABE8-3A88-EE460A2AA96A}"/>
+              </a:ext>
+            </a:extLst>
+          </p:cNvPr>
+          <p:cNvSpPr>
+            <a:spLocks noGrp="1" noRot="1" noChangeAspect="1"/>
+          </p:cNvSpPr>
+          <p:nvPr>
+            <p:ph type="sldImg"/>
+          </p:nvPr>
+        </p:nvSpPr>
+        <p:spPr/>
+      </p:sp>
+      <p:sp>
+        <p:nvSpPr>
+          <p:cNvPr id="3" name="슬라이드 노트 개체 틀 2">
+            <a:extLst>
+              <a:ext uri="{FF2B5EF4-FFF2-40B4-BE49-F238E27FC236}">
+                <a16:creationId xmlns:a16="http://schemas.microsoft.com/office/drawing/2014/main" id="{5CF82164-6B24-2813-94BD-DCD3B6F1B3E8}"/>
+              </a:ext>
+            </a:extLst>
+          </p:cNvPr>
+          <p:cNvSpPr>
+            <a:spLocks noGrp="1"/>
+          </p:cNvSpPr>
+          <p:nvPr>
+            <p:ph type="body" idx="1"/>
+          </p:nvPr>
+        </p:nvSpPr>
+        <p:spPr/>
+        <p:txBody>
+          <a:bodyPr/>
+          <a:lstStyle/>
+          <a:p>
+            <a:endParaRPr lang="ko-KR" altLang="en-US" dirty="0"/>
+          </a:p>
+        </p:txBody>
+      </p:sp>
+      <p:sp>
+        <p:nvSpPr>
+          <p:cNvPr id="4" name="슬라이드 번호 개체 틀 3">
+            <a:extLst>
+              <a:ext uri="{FF2B5EF4-FFF2-40B4-BE49-F238E27FC236}">
+                <a16:creationId xmlns:a16="http://schemas.microsoft.com/office/drawing/2014/main" id="{954793AB-19A4-C8C7-892D-8C19BB10B2ED}"/>
+              </a:ext>
+            </a:extLst>
+          </p:cNvPr>
+          <p:cNvSpPr>
+            <a:spLocks noGrp="1"/>
+          </p:cNvSpPr>
+          <p:nvPr>
+            <p:ph type="sldNum" sz="quarter" idx="5"/>
+          </p:nvPr>
+        </p:nvSpPr>
+        <p:spPr/>
+        <p:txBody>
+          <a:bodyPr/>
+          <a:lstStyle/>
+          <a:p>
+            <a:fld id="{353DFDED-2E9F-41DA-A9FA-780DFF41939C}" type="slidenum">
+              <a:rPr lang="ko-KR" altLang="en-US" smtClean="0"/>
+              <a:t>49</a:t>
+            </a:fld>
+            <a:endParaRPr lang="ko-KR" altLang="en-US"/>
+          </a:p>
+        </p:txBody>
+      </p:sp>
+    </p:spTree>
+    <p:extLst>
+      <p:ext uri="{BB962C8B-B14F-4D97-AF65-F5344CB8AC3E}">
+        <p14:creationId xmlns:p14="http://schemas.microsoft.com/office/powerpoint/2010/main" val="3589469086"/>
+      </p:ext>
+    </p:extLst>
+  </p:cSld>
+  <p:clrMapOvr>
+    <a:masterClrMapping/>
+  </p:clrMapOvr>
+</p:notes>
+</file>
+
+<file path=ppt/notesSlides/notesSlide39.xml><?xml version="1.0" encoding="utf-8"?>
+<p:notes xmlns:a="http://schemas.openxmlformats.org/drawingml/2006/main" xmlns:r="http://schemas.openxmlformats.org/officeDocument/2006/relationships" xmlns:p="http://schemas.openxmlformats.org/presentationml/2006/main">
+  <p:cSld>
+    <p:spTree>
+      <p:nvGrpSpPr>
+        <p:cNvPr id="1" name="">
+          <a:extLst>
+            <a:ext uri="{FF2B5EF4-FFF2-40B4-BE49-F238E27FC236}">
+              <a16:creationId xmlns:a16="http://schemas.microsoft.com/office/drawing/2014/main" id="{4CDF9291-A44C-F69B-D5A6-4E3989AB37AF}"/>
+            </a:ext>
+          </a:extLst>
+        </p:cNvPr>
+        <p:cNvGrpSpPr/>
+        <p:nvPr/>
+      </p:nvGrpSpPr>
+      <p:grpSpPr>
+        <a:xfrm>
+          <a:off x="0" y="0"/>
+          <a:ext cx="0" cy="0"/>
+          <a:chOff x="0" y="0"/>
+          <a:chExt cx="0" cy="0"/>
+        </a:xfrm>
+      </p:grpSpPr>
+      <p:sp>
+        <p:nvSpPr>
+          <p:cNvPr id="2" name="슬라이드 이미지 개체 틀 1">
+            <a:extLst>
+              <a:ext uri="{FF2B5EF4-FFF2-40B4-BE49-F238E27FC236}">
+                <a16:creationId xmlns:a16="http://schemas.microsoft.com/office/drawing/2014/main" id="{9124CBA0-F7B0-2993-A609-DFF168928BAD}"/>
+              </a:ext>
+            </a:extLst>
+          </p:cNvPr>
+          <p:cNvSpPr>
+            <a:spLocks noGrp="1" noRot="1" noChangeAspect="1"/>
+          </p:cNvSpPr>
+          <p:nvPr>
+            <p:ph type="sldImg"/>
+          </p:nvPr>
+        </p:nvSpPr>
+        <p:spPr/>
+      </p:sp>
+      <p:sp>
+        <p:nvSpPr>
+          <p:cNvPr id="3" name="슬라이드 노트 개체 틀 2">
+            <a:extLst>
+              <a:ext uri="{FF2B5EF4-FFF2-40B4-BE49-F238E27FC236}">
+                <a16:creationId xmlns:a16="http://schemas.microsoft.com/office/drawing/2014/main" id="{91CC0E9B-591F-A64A-A7F5-1B23BFFB32A8}"/>
+              </a:ext>
+            </a:extLst>
+          </p:cNvPr>
+          <p:cNvSpPr>
+            <a:spLocks noGrp="1"/>
+          </p:cNvSpPr>
+          <p:nvPr>
+            <p:ph type="body" idx="1"/>
+          </p:nvPr>
+        </p:nvSpPr>
+        <p:spPr/>
+        <p:txBody>
+          <a:bodyPr/>
+          <a:lstStyle/>
+          <a:p>
+            <a:endParaRPr lang="ko-KR" altLang="en-US" dirty="0"/>
+          </a:p>
+        </p:txBody>
+      </p:sp>
+      <p:sp>
+        <p:nvSpPr>
+          <p:cNvPr id="4" name="슬라이드 번호 개체 틀 3">
+            <a:extLst>
+              <a:ext uri="{FF2B5EF4-FFF2-40B4-BE49-F238E27FC236}">
+                <a16:creationId xmlns:a16="http://schemas.microsoft.com/office/drawing/2014/main" id="{B854BD46-1179-2C05-A7F7-75A8DBBBD7BB}"/>
+              </a:ext>
+            </a:extLst>
+          </p:cNvPr>
+          <p:cNvSpPr>
+            <a:spLocks noGrp="1"/>
+          </p:cNvSpPr>
+          <p:nvPr>
+            <p:ph type="sldNum" sz="quarter" idx="5"/>
+          </p:nvPr>
+        </p:nvSpPr>
+        <p:spPr/>
+        <p:txBody>
+          <a:bodyPr/>
+          <a:lstStyle/>
+          <a:p>
+            <a:fld id="{353DFDED-2E9F-41DA-A9FA-780DFF41939C}" type="slidenum">
+              <a:rPr lang="ko-KR" altLang="en-US" smtClean="0"/>
+              <a:t>50</a:t>
+            </a:fld>
+            <a:endParaRPr lang="ko-KR" altLang="en-US"/>
+          </a:p>
+        </p:txBody>
+      </p:sp>
+    </p:spTree>
+    <p:extLst>
+      <p:ext uri="{BB962C8B-B14F-4D97-AF65-F5344CB8AC3E}">
+        <p14:creationId xmlns:p14="http://schemas.microsoft.com/office/powerpoint/2010/main" val="1733722570"/>
       </p:ext>
     </p:extLst>
   </p:cSld>
@@ -33071,8 +33289,24 @@
               <a:t>7. </a:t>
             </a:r>
             <a:r>
+              <a:rPr lang="ko-KR" altLang="en-US" sz="3200" b="1" dirty="0" err="1"/>
+              <a:t>베이즈</a:t>
+            </a:r>
+            <a:r>
+              <a:rPr lang="en-US" altLang="ko-KR" sz="3200" b="1" dirty="0"/>
+              <a:t>(</a:t>
+            </a:r>
+            <a:r>
+              <a:rPr lang="ko-KR" altLang="ko-KR" sz="3200" dirty="0" err="1"/>
+              <a:t>Bayes</a:t>
+            </a:r>
+            <a:r>
+              <a:rPr lang="en-US" altLang="ko-KR" sz="3200" dirty="0"/>
+              <a:t>)</a:t>
+            </a:r>
+            <a:r>
               <a:rPr lang="ko-KR" altLang="en-US" sz="3200" b="1" dirty="0"/>
-              <a:t>베이지안 정리</a:t>
+              <a:t> 정리</a:t>
             </a:r>
             <a:r>
               <a:rPr lang="en-US" altLang="ko-KR" sz="3200" b="1" dirty="0"/>
@@ -33189,21 +33423,7 @@
           </a:bodyPr>
           <a:lstStyle/>
           <a:p>
-            <a:pPr marL="0" marR="0" lvl="0" indent="0" algn="l" defTabSz="914400" rtl="0" eaLnBrk="1" fontAlgn="auto" latinLnBrk="1" hangingPunct="1">
-              <a:lnSpc>
-                <a:spcPct val="100000"/>
-              </a:lnSpc>
-              <a:spcBef>
-                <a:spcPts val="0"/>
-              </a:spcBef>
-              <a:spcAft>
-                <a:spcPts val="0"/>
-              </a:spcAft>
-              <a:buClrTx/>
-              <a:buSzTx/>
-              <a:buFontTx/>
-              <a:buNone/>
-              <a:tabLst/>
+            <a:pPr lvl="0">
               <a:defRPr/>
             </a:pPr>
             <a:r>
@@ -33215,6 +33435,34 @@
                 <a:ea typeface="나눔바른고딕" panose="020B0603020101020101" pitchFamily="50" charset="-127"/>
               </a:rPr>
               <a:t>베이즈</a:t>
+            </a:r>
+            <a:r>
+              <a:rPr lang="en-US" altLang="ko-KR" sz="3600" dirty="0">
+                <a:solidFill>
+                  <a:prstClr val="white"/>
+                </a:solidFill>
+                <a:latin typeface="나눔바른고딕" panose="020B0603020101020101" pitchFamily="50" charset="-127"/>
+                <a:ea typeface="나눔바른고딕" panose="020B0603020101020101" pitchFamily="50" charset="-127"/>
+              </a:rPr>
+              <a:t>(</a:t>
+            </a:r>
+            <a:r>
+              <a:rPr lang="ko-KR" altLang="ko-KR" sz="3600" dirty="0" err="1">
+                <a:solidFill>
+                  <a:schemeClr val="bg1"/>
+                </a:solidFill>
+              </a:rPr>
+              <a:t>Bayes</a:t>
+            </a:r>
+            <a:r>
+              <a:rPr lang="en-US" altLang="ko-KR" sz="3600" dirty="0">
+                <a:solidFill>
+                  <a:prstClr val="white"/>
+                </a:solidFill>
+                <a:latin typeface="나눔바른고딕" panose="020B0603020101020101" pitchFamily="50" charset="-127"/>
+                <a:ea typeface="나눔바른고딕" panose="020B0603020101020101" pitchFamily="50" charset="-127"/>
+              </a:rPr>
+              <a:t>)</a:t>
             </a:r>
             <a:r>
               <a:rPr lang="ko-KR" altLang="en-US" sz="3600" dirty="0">
@@ -34342,8 +34590,8 @@
           </a:p>
         </p:txBody>
       </p:sp>
-      <mc:AlternateContent xmlns:mc="http://schemas.openxmlformats.org/markup-compatibility/2006">
-        <mc:Choice xmlns:a14="http://schemas.microsoft.com/office/drawing/2010/main" Requires="a14">
+      <mc:AlternateContent xmlns:mc="http://schemas.openxmlformats.org/markup-compatibility/2006" xmlns:a14="http://schemas.microsoft.com/office/drawing/2010/main">
+        <mc:Choice Requires="a14">
           <p:sp>
             <p:nvSpPr>
               <p:cNvPr id="35" name="TextBox 34">
@@ -34372,6 +34620,7 @@
               </a:bodyPr>
               <a:lstStyle/>
               <a:p>
+                <a:pPr/>
                 <a14:m>
                   <m:oMathPara xmlns:m="http://schemas.openxmlformats.org/officeDocument/2006/math">
                     <m:oMathParaPr>
@@ -34633,7 +34882,7 @@
             </p:txBody>
           </p:sp>
         </mc:Choice>
-        <mc:Fallback>
+        <mc:Fallback xmlns="">
           <p:sp>
             <p:nvSpPr>
               <p:cNvPr id="35" name="TextBox 34">
@@ -35094,8 +35343,8 @@
           </a:p>
         </p:txBody>
       </p:sp>
-      <mc:AlternateContent xmlns:mc="http://schemas.openxmlformats.org/markup-compatibility/2006">
-        <mc:Choice xmlns:a14="http://schemas.microsoft.com/office/drawing/2010/main" Requires="a14">
+      <mc:AlternateContent xmlns:mc="http://schemas.openxmlformats.org/markup-compatibility/2006" xmlns:a14="http://schemas.microsoft.com/office/drawing/2010/main">
+        <mc:Choice Requires="a14">
           <p:sp>
             <p:nvSpPr>
               <p:cNvPr id="35" name="TextBox 34">
@@ -35124,6 +35373,7 @@
               </a:bodyPr>
               <a:lstStyle/>
               <a:p>
+                <a:pPr/>
                 <a14:m>
                   <m:oMathPara xmlns:m="http://schemas.openxmlformats.org/officeDocument/2006/math">
                     <m:oMathParaPr>
@@ -35385,7 +35635,7 @@
             </p:txBody>
           </p:sp>
         </mc:Choice>
-        <mc:Fallback>
+        <mc:Fallback xmlns="">
           <p:sp>
             <p:nvSpPr>
               <p:cNvPr id="35" name="TextBox 34">
@@ -35582,8 +35832,8 @@
           </a:p>
         </p:txBody>
       </p:sp>
-      <mc:AlternateContent xmlns:mc="http://schemas.openxmlformats.org/markup-compatibility/2006">
-        <mc:Choice xmlns:a14="http://schemas.microsoft.com/office/drawing/2010/main" Requires="a14">
+      <mc:AlternateContent xmlns:mc="http://schemas.openxmlformats.org/markup-compatibility/2006" xmlns:a14="http://schemas.microsoft.com/office/drawing/2010/main">
+        <mc:Choice Requires="a14">
           <p:sp>
             <p:nvSpPr>
               <p:cNvPr id="5" name="TextBox 4">
@@ -35709,7 +35959,7 @@
             </p:txBody>
           </p:sp>
         </mc:Choice>
-        <mc:Fallback>
+        <mc:Fallback xmlns="">
           <p:sp>
             <p:nvSpPr>
               <p:cNvPr id="5" name="TextBox 4">
@@ -35758,6 +36008,684 @@
     <p:extLst>
       <p:ext uri="{BB962C8B-B14F-4D97-AF65-F5344CB8AC3E}">
         <p14:creationId xmlns:p14="http://schemas.microsoft.com/office/powerpoint/2010/main" val="1593164887"/>
+      </p:ext>
+    </p:extLst>
+  </p:cSld>
+  <p:clrMapOvr>
+    <a:masterClrMapping/>
+  </p:clrMapOvr>
+</p:sld>
+</file>
+
+<file path=ppt/slides/slide49.xml><?xml version="1.0" encoding="utf-8"?>
+<p:sld xmlns:a="http://schemas.openxmlformats.org/drawingml/2006/main" xmlns:r="http://schemas.openxmlformats.org/officeDocument/2006/relationships" xmlns:p="http://schemas.openxmlformats.org/presentationml/2006/main">
+  <p:cSld>
+    <p:spTree>
+      <p:nvGrpSpPr>
+        <p:cNvPr id="1" name="">
+          <a:extLst>
+            <a:ext uri="{FF2B5EF4-FFF2-40B4-BE49-F238E27FC236}">
+              <a16:creationId xmlns:a16="http://schemas.microsoft.com/office/drawing/2014/main" id="{355C6A20-DF9D-FFDD-14E8-E6DDF16146E2}"/>
+            </a:ext>
+          </a:extLst>
+        </p:cNvPr>
+        <p:cNvGrpSpPr/>
+        <p:nvPr/>
+      </p:nvGrpSpPr>
+      <p:grpSpPr>
+        <a:xfrm>
+          <a:off x="0" y="0"/>
+          <a:ext cx="0" cy="0"/>
+          <a:chOff x="0" y="0"/>
+          <a:chExt cx="0" cy="0"/>
+        </a:xfrm>
+      </p:grpSpPr>
+      <p:sp>
+        <p:nvSpPr>
+          <p:cNvPr id="2" name="TextBox 1">
+            <a:extLst>
+              <a:ext uri="{FF2B5EF4-FFF2-40B4-BE49-F238E27FC236}">
+                <a16:creationId xmlns:a16="http://schemas.microsoft.com/office/drawing/2014/main" id="{E0E31F35-023A-4CC2-7F08-FEB5C5FF530A}"/>
+              </a:ext>
+            </a:extLst>
+          </p:cNvPr>
+          <p:cNvSpPr txBox="1"/>
+          <p:nvPr/>
+        </p:nvSpPr>
+        <p:spPr>
+          <a:xfrm>
+            <a:off x="1473199" y="375920"/>
+            <a:ext cx="9347200" cy="646331"/>
+          </a:xfrm>
+          <a:prstGeom prst="rect">
+            <a:avLst/>
+          </a:prstGeom>
+          <a:noFill/>
+        </p:spPr>
+        <p:txBody>
+          <a:bodyPr wrap="square" rtlCol="0">
+            <a:spAutoFit/>
+          </a:bodyPr>
+          <a:lstStyle/>
+          <a:p>
+            <a:pPr marL="0" marR="0" lvl="0" indent="0" algn="l" defTabSz="914400" rtl="0" eaLnBrk="1" fontAlgn="auto" latinLnBrk="1" hangingPunct="1">
+              <a:lnSpc>
+                <a:spcPct val="100000"/>
+              </a:lnSpc>
+              <a:spcBef>
+                <a:spcPts val="0"/>
+              </a:spcBef>
+              <a:spcAft>
+                <a:spcPts val="0"/>
+              </a:spcAft>
+              <a:buClrTx/>
+              <a:buSzTx/>
+              <a:buFontTx/>
+              <a:buNone/>
+              <a:tabLst/>
+              <a:defRPr/>
+            </a:pPr>
+            <a:r>
+              <a:rPr lang="ko-KR" altLang="en-US" sz="3600" dirty="0" err="1">
+                <a:solidFill>
+                  <a:prstClr val="white"/>
+                </a:solidFill>
+                <a:latin typeface="나눔바른고딕" panose="020B0603020101020101" pitchFamily="50" charset="-127"/>
+                <a:ea typeface="나눔바른고딕" panose="020B0603020101020101" pitchFamily="50" charset="-127"/>
+              </a:rPr>
+              <a:t>나이브</a:t>
+            </a:r>
+            <a:r>
+              <a:rPr lang="ko-KR" altLang="en-US" sz="3600" dirty="0">
+                <a:solidFill>
+                  <a:prstClr val="white"/>
+                </a:solidFill>
+                <a:latin typeface="나눔바른고딕" panose="020B0603020101020101" pitchFamily="50" charset="-127"/>
+                <a:ea typeface="나눔바른고딕" panose="020B0603020101020101" pitchFamily="50" charset="-127"/>
+              </a:rPr>
+              <a:t> </a:t>
+            </a:r>
+            <a:r>
+              <a:rPr lang="ko-KR" altLang="en-US" sz="3600" dirty="0" err="1">
+                <a:solidFill>
+                  <a:prstClr val="white"/>
+                </a:solidFill>
+                <a:latin typeface="나눔바른고딕" panose="020B0603020101020101" pitchFamily="50" charset="-127"/>
+                <a:ea typeface="나눔바른고딕" panose="020B0603020101020101" pitchFamily="50" charset="-127"/>
+              </a:rPr>
+              <a:t>베이즈</a:t>
+            </a:r>
+            <a:endParaRPr kumimoji="0" lang="ko-KR" altLang="en-US" sz="1800" b="0" i="0" u="none" strike="noStrike" kern="1200" cap="none" spc="0" normalizeH="0" baseline="0" noProof="0" dirty="0">
+              <a:ln>
+                <a:noFill/>
+              </a:ln>
+              <a:solidFill>
+                <a:prstClr val="white"/>
+              </a:solidFill>
+              <a:effectLst/>
+              <a:uLnTx/>
+              <a:uFillTx/>
+              <a:latin typeface="나눔바른고딕" panose="020B0603020101020101" pitchFamily="50" charset="-127"/>
+              <a:ea typeface="나눔바른고딕" panose="020B0603020101020101" pitchFamily="50" charset="-127"/>
+              <a:cs typeface="+mn-cs"/>
+            </a:endParaRPr>
+          </a:p>
+        </p:txBody>
+      </p:sp>
+      <p:grpSp>
+        <p:nvGrpSpPr>
+          <p:cNvPr id="24" name="그룹 23">
+            <a:extLst>
+              <a:ext uri="{FF2B5EF4-FFF2-40B4-BE49-F238E27FC236}">
+                <a16:creationId xmlns:a16="http://schemas.microsoft.com/office/drawing/2014/main" id="{D72807A1-0514-E8DB-D684-2255A79D61F7}"/>
+              </a:ext>
+            </a:extLst>
+          </p:cNvPr>
+          <p:cNvGrpSpPr/>
+          <p:nvPr/>
+        </p:nvGrpSpPr>
+        <p:grpSpPr>
+          <a:xfrm>
+            <a:off x="10971530" y="345440"/>
+            <a:ext cx="1332231" cy="863600"/>
+            <a:chOff x="10971530" y="345440"/>
+            <a:chExt cx="1332231" cy="863600"/>
+          </a:xfrm>
+        </p:grpSpPr>
+        <p:pic>
+          <p:nvPicPr>
+            <p:cNvPr id="22" name="그림 21">
+              <a:extLst>
+                <a:ext uri="{FF2B5EF4-FFF2-40B4-BE49-F238E27FC236}">
+                  <a16:creationId xmlns:a16="http://schemas.microsoft.com/office/drawing/2014/main" id="{25A3462F-0F4C-2F07-7178-336710936679}"/>
+                </a:ext>
+              </a:extLst>
+            </p:cNvPr>
+            <p:cNvPicPr>
+              <a:picLocks noChangeAspect="1"/>
+            </p:cNvPicPr>
+            <p:nvPr/>
+          </p:nvPicPr>
+          <p:blipFill>
+            <a:blip r:embed="rId3" cstate="print">
+              <a:extLst>
+                <a:ext uri="{28A0092B-C50C-407E-A947-70E740481C1C}">
+                  <a14:useLocalDpi xmlns:a14="http://schemas.microsoft.com/office/drawing/2010/main" val="0"/>
+                </a:ext>
+              </a:extLst>
+            </a:blip>
+            <a:stretch>
+              <a:fillRect/>
+            </a:stretch>
+          </p:blipFill>
+          <p:spPr>
+            <a:xfrm>
+              <a:off x="11008361" y="345440"/>
+              <a:ext cx="1295400" cy="863600"/>
+            </a:xfrm>
+            <a:prstGeom prst="rect">
+              <a:avLst/>
+            </a:prstGeom>
+            <a:effectLst>
+              <a:outerShdw sx="1000" sy="1000" algn="ctr" rotWithShape="0">
+                <a:srgbClr val="000000"/>
+              </a:outerShdw>
+              <a:reflection endPos="0" dir="5400000" sy="-100000" algn="bl" rotWithShape="0"/>
+            </a:effectLst>
+          </p:spPr>
+        </p:pic>
+        <p:sp>
+          <p:nvSpPr>
+            <p:cNvPr id="23" name="직사각형 22">
+              <a:extLst>
+                <a:ext uri="{FF2B5EF4-FFF2-40B4-BE49-F238E27FC236}">
+                  <a16:creationId xmlns:a16="http://schemas.microsoft.com/office/drawing/2014/main" id="{38E4FDBB-8ACA-9A6D-A67D-15DC12789292}"/>
+                </a:ext>
+              </a:extLst>
+            </p:cNvPr>
+            <p:cNvSpPr/>
+            <p:nvPr/>
+          </p:nvSpPr>
+          <p:spPr>
+            <a:xfrm>
+              <a:off x="10971530" y="375919"/>
+              <a:ext cx="1181100" cy="646331"/>
+            </a:xfrm>
+            <a:prstGeom prst="rect">
+              <a:avLst/>
+            </a:prstGeom>
+            <a:solidFill>
+              <a:schemeClr val="accent1">
+                <a:alpha val="50000"/>
+              </a:schemeClr>
+            </a:solidFill>
+            <a:ln>
+              <a:noFill/>
+            </a:ln>
+          </p:spPr>
+          <p:style>
+            <a:lnRef idx="2">
+              <a:schemeClr val="accent1">
+                <a:shade val="50000"/>
+              </a:schemeClr>
+            </a:lnRef>
+            <a:fillRef idx="1">
+              <a:schemeClr val="accent1"/>
+            </a:fillRef>
+            <a:effectRef idx="0">
+              <a:schemeClr val="accent1"/>
+            </a:effectRef>
+            <a:fontRef idx="minor">
+              <a:schemeClr val="lt1"/>
+            </a:fontRef>
+          </p:style>
+          <p:txBody>
+            <a:bodyPr rtlCol="0" anchor="ctr"/>
+            <a:lstStyle/>
+            <a:p>
+              <a:pPr marL="0" marR="0" lvl="0" indent="0" algn="ctr" defTabSz="914400" rtl="0" eaLnBrk="1" fontAlgn="auto" latinLnBrk="1" hangingPunct="1">
+                <a:lnSpc>
+                  <a:spcPct val="100000"/>
+                </a:lnSpc>
+                <a:spcBef>
+                  <a:spcPts val="0"/>
+                </a:spcBef>
+                <a:spcAft>
+                  <a:spcPts val="0"/>
+                </a:spcAft>
+                <a:buClrTx/>
+                <a:buSzTx/>
+                <a:buFontTx/>
+                <a:buNone/>
+                <a:tabLst/>
+                <a:defRPr/>
+              </a:pPr>
+              <a:endParaRPr kumimoji="0" lang="ko-KR" altLang="en-US" sz="1800" b="0" i="0" u="none" strike="noStrike" kern="1200" cap="none" spc="0" normalizeH="0" baseline="0" noProof="0">
+                <a:ln>
+                  <a:noFill/>
+                </a:ln>
+                <a:solidFill>
+                  <a:prstClr val="white"/>
+                </a:solidFill>
+                <a:effectLst/>
+                <a:uLnTx/>
+                <a:uFillTx/>
+                <a:latin typeface="나눔바른고딕 Light"/>
+                <a:ea typeface="맑은 고딕"/>
+                <a:cs typeface="+mn-cs"/>
+              </a:endParaRPr>
+            </a:p>
+          </p:txBody>
+        </p:sp>
+      </p:grpSp>
+      <p:graphicFrame>
+        <p:nvGraphicFramePr>
+          <p:cNvPr id="14" name="표 13">
+            <a:extLst>
+              <a:ext uri="{FF2B5EF4-FFF2-40B4-BE49-F238E27FC236}">
+                <a16:creationId xmlns:a16="http://schemas.microsoft.com/office/drawing/2014/main" id="{1781454C-3C31-BD39-50EA-724D48132B7A}"/>
+              </a:ext>
+            </a:extLst>
+          </p:cNvPr>
+          <p:cNvGraphicFramePr>
+            <a:graphicFrameLocks noGrp="1"/>
+          </p:cNvGraphicFramePr>
+          <p:nvPr>
+            <p:extLst>
+              <p:ext uri="{D42A27DB-BD31-4B8C-83A1-F6EECF244321}">
+                <p14:modId xmlns:p14="http://schemas.microsoft.com/office/powerpoint/2010/main" val="443568417"/>
+              </p:ext>
+            </p:extLst>
+          </p:nvPr>
+        </p:nvGraphicFramePr>
+        <p:xfrm>
+          <a:off x="1473199" y="2584891"/>
+          <a:ext cx="9014175" cy="2225040"/>
+        </p:xfrm>
+        <a:graphic>
+          <a:graphicData uri="http://schemas.openxmlformats.org/drawingml/2006/table">
+            <a:tbl>
+              <a:tblPr firstRow="1" bandRow="1">
+                <a:tableStyleId>{5C22544A-7EE6-4342-B048-85BDC9FD1C3A}</a:tableStyleId>
+              </a:tblPr>
+              <a:tblGrid>
+                <a:gridCol w="3004725">
+                  <a:extLst>
+                    <a:ext uri="{9D8B030D-6E8A-4147-A177-3AD203B41FA5}">
+                      <a16:colId xmlns:a16="http://schemas.microsoft.com/office/drawing/2014/main" val="3871590892"/>
+                    </a:ext>
+                  </a:extLst>
+                </a:gridCol>
+                <a:gridCol w="3004725">
+                  <a:extLst>
+                    <a:ext uri="{9D8B030D-6E8A-4147-A177-3AD203B41FA5}">
+                      <a16:colId xmlns:a16="http://schemas.microsoft.com/office/drawing/2014/main" val="773222345"/>
+                    </a:ext>
+                  </a:extLst>
+                </a:gridCol>
+                <a:gridCol w="3004725">
+                  <a:extLst>
+                    <a:ext uri="{9D8B030D-6E8A-4147-A177-3AD203B41FA5}">
+                      <a16:colId xmlns:a16="http://schemas.microsoft.com/office/drawing/2014/main" val="3917424597"/>
+                    </a:ext>
+                  </a:extLst>
+                </a:gridCol>
+              </a:tblGrid>
+              <a:tr h="370840">
+                <a:tc>
+                  <a:txBody>
+                    <a:bodyPr/>
+                    <a:lstStyle/>
+                    <a:p>
+                      <a:pPr algn="ctr">
+                        <a:buNone/>
+                      </a:pPr>
+                      <a:r>
+                        <a:rPr lang="ko-KR" dirty="0"/>
+                        <a:t>구분</a:t>
+                      </a:r>
+                    </a:p>
+                  </a:txBody>
+                  <a:tcPr anchor="ctr"/>
+                </a:tc>
+                <a:tc>
+                  <a:txBody>
+                    <a:bodyPr/>
+                    <a:lstStyle/>
+                    <a:p>
+                      <a:pPr algn="ctr">
+                        <a:buNone/>
+                      </a:pPr>
+                      <a:r>
+                        <a:rPr lang="ko-KR"/>
+                        <a:t>Bayes 정리</a:t>
+                      </a:r>
+                    </a:p>
+                  </a:txBody>
+                  <a:tcPr anchor="ctr"/>
+                </a:tc>
+                <a:tc>
+                  <a:txBody>
+                    <a:bodyPr/>
+                    <a:lstStyle/>
+                    <a:p>
+                      <a:pPr algn="ctr">
+                        <a:buNone/>
+                      </a:pPr>
+                      <a:r>
+                        <a:rPr lang="ko-KR"/>
+                        <a:t>Naive Bayes</a:t>
+                      </a:r>
+                    </a:p>
+                  </a:txBody>
+                  <a:tcPr anchor="ctr"/>
+                </a:tc>
+                <a:extLst>
+                  <a:ext uri="{0D108BD9-81ED-4DB2-BD59-A6C34878D82A}">
+                    <a16:rowId xmlns:a16="http://schemas.microsoft.com/office/drawing/2014/main" val="491092945"/>
+                  </a:ext>
+                </a:extLst>
+              </a:tr>
+              <a:tr h="370840">
+                <a:tc>
+                  <a:txBody>
+                    <a:bodyPr/>
+                    <a:lstStyle/>
+                    <a:p>
+                      <a:pPr algn="ctr">
+                        <a:buNone/>
+                      </a:pPr>
+                      <a:r>
+                        <a:rPr lang="ko-KR" dirty="0"/>
+                        <a:t>성격</a:t>
+                      </a:r>
+                    </a:p>
+                  </a:txBody>
+                  <a:tcPr anchor="ctr"/>
+                </a:tc>
+                <a:tc>
+                  <a:txBody>
+                    <a:bodyPr/>
+                    <a:lstStyle/>
+                    <a:p>
+                      <a:pPr algn="ctr">
+                        <a:buNone/>
+                      </a:pPr>
+                      <a:r>
+                        <a:rPr lang="ko-KR" dirty="0"/>
+                        <a:t>수학 공식</a:t>
+                      </a:r>
+                    </a:p>
+                  </a:txBody>
+                  <a:tcPr anchor="ctr"/>
+                </a:tc>
+                <a:tc>
+                  <a:txBody>
+                    <a:bodyPr/>
+                    <a:lstStyle/>
+                    <a:p>
+                      <a:pPr algn="ctr">
+                        <a:buNone/>
+                      </a:pPr>
+                      <a:r>
+                        <a:rPr lang="ko-KR"/>
+                        <a:t>머신러닝 알고리즘</a:t>
+                      </a:r>
+                    </a:p>
+                  </a:txBody>
+                  <a:tcPr anchor="ctr"/>
+                </a:tc>
+                <a:extLst>
+                  <a:ext uri="{0D108BD9-81ED-4DB2-BD59-A6C34878D82A}">
+                    <a16:rowId xmlns:a16="http://schemas.microsoft.com/office/drawing/2014/main" val="3469400712"/>
+                  </a:ext>
+                </a:extLst>
+              </a:tr>
+              <a:tr h="370840">
+                <a:tc>
+                  <a:txBody>
+                    <a:bodyPr/>
+                    <a:lstStyle/>
+                    <a:p>
+                      <a:pPr algn="ctr">
+                        <a:buNone/>
+                      </a:pPr>
+                      <a:r>
+                        <a:rPr lang="ko-KR"/>
+                        <a:t>역할</a:t>
+                      </a:r>
+                    </a:p>
+                  </a:txBody>
+                  <a:tcPr anchor="ctr"/>
+                </a:tc>
+                <a:tc>
+                  <a:txBody>
+                    <a:bodyPr/>
+                    <a:lstStyle/>
+                    <a:p>
+                      <a:pPr algn="ctr">
+                        <a:buNone/>
+                      </a:pPr>
+                      <a:r>
+                        <a:rPr lang="ko-KR" dirty="0"/>
+                        <a:t>확률 계산 원리</a:t>
+                      </a:r>
+                    </a:p>
+                  </a:txBody>
+                  <a:tcPr anchor="ctr"/>
+                </a:tc>
+                <a:tc>
+                  <a:txBody>
+                    <a:bodyPr/>
+                    <a:lstStyle/>
+                    <a:p>
+                      <a:pPr algn="ctr">
+                        <a:buNone/>
+                      </a:pPr>
+                      <a:r>
+                        <a:rPr lang="ko-KR" dirty="0"/>
+                        <a:t>분류 모델</a:t>
+                      </a:r>
+                    </a:p>
+                  </a:txBody>
+                  <a:tcPr anchor="ctr"/>
+                </a:tc>
+                <a:extLst>
+                  <a:ext uri="{0D108BD9-81ED-4DB2-BD59-A6C34878D82A}">
+                    <a16:rowId xmlns:a16="http://schemas.microsoft.com/office/drawing/2014/main" val="4135111952"/>
+                  </a:ext>
+                </a:extLst>
+              </a:tr>
+              <a:tr h="370840">
+                <a:tc>
+                  <a:txBody>
+                    <a:bodyPr/>
+                    <a:lstStyle/>
+                    <a:p>
+                      <a:pPr algn="ctr">
+                        <a:buNone/>
+                      </a:pPr>
+                      <a:r>
+                        <a:rPr lang="ko-KR" dirty="0"/>
+                        <a:t>입력</a:t>
+                      </a:r>
+                    </a:p>
+                  </a:txBody>
+                  <a:tcPr anchor="ctr"/>
+                </a:tc>
+                <a:tc>
+                  <a:txBody>
+                    <a:bodyPr/>
+                    <a:lstStyle/>
+                    <a:p>
+                      <a:pPr algn="ctr">
+                        <a:buNone/>
+                      </a:pPr>
+                      <a:r>
+                        <a:rPr lang="ko-KR" dirty="0"/>
+                        <a:t>조건부 확률</a:t>
+                      </a:r>
+                    </a:p>
+                  </a:txBody>
+                  <a:tcPr anchor="ctr"/>
+                </a:tc>
+                <a:tc>
+                  <a:txBody>
+                    <a:bodyPr/>
+                    <a:lstStyle/>
+                    <a:p>
+                      <a:pPr algn="ctr">
+                        <a:buNone/>
+                      </a:pPr>
+                      <a:r>
+                        <a:rPr lang="ko-KR"/>
+                        <a:t>데이터 특징들</a:t>
+                      </a:r>
+                    </a:p>
+                  </a:txBody>
+                  <a:tcPr anchor="ctr"/>
+                </a:tc>
+                <a:extLst>
+                  <a:ext uri="{0D108BD9-81ED-4DB2-BD59-A6C34878D82A}">
+                    <a16:rowId xmlns:a16="http://schemas.microsoft.com/office/drawing/2014/main" val="1726375855"/>
+                  </a:ext>
+                </a:extLst>
+              </a:tr>
+              <a:tr h="370840">
+                <a:tc>
+                  <a:txBody>
+                    <a:bodyPr/>
+                    <a:lstStyle/>
+                    <a:p>
+                      <a:pPr algn="ctr">
+                        <a:buNone/>
+                      </a:pPr>
+                      <a:r>
+                        <a:rPr lang="ko-KR" dirty="0"/>
+                        <a:t>핵심</a:t>
+                      </a:r>
+                    </a:p>
+                  </a:txBody>
+                  <a:tcPr anchor="ctr"/>
+                </a:tc>
+                <a:tc>
+                  <a:txBody>
+                    <a:bodyPr/>
+                    <a:lstStyle/>
+                    <a:p>
+                      <a:pPr algn="ctr">
+                        <a:buNone/>
+                      </a:pPr>
+                      <a:r>
+                        <a:rPr lang="ko-KR" dirty="0"/>
+                        <a:t>(</a:t>
+                      </a:r>
+                      <a:r>
+                        <a:rPr lang="ko-KR" dirty="0" err="1"/>
+                        <a:t>P</a:t>
+                      </a:r>
+                      <a:r>
+                        <a:rPr lang="ko-KR" dirty="0"/>
+                        <a:t>(</a:t>
+                      </a:r>
+                      <a:r>
+                        <a:rPr lang="ko-KR" dirty="0" err="1"/>
+                        <a:t>A</a:t>
+                      </a:r>
+                      <a:endParaRPr lang="ko-KR" dirty="0"/>
+                    </a:p>
+                  </a:txBody>
+                  <a:tcPr anchor="ctr"/>
+                </a:tc>
+                <a:tc>
+                  <a:txBody>
+                    <a:bodyPr/>
+                    <a:lstStyle/>
+                    <a:p>
+                      <a:pPr algn="ctr">
+                        <a:buNone/>
+                      </a:pPr>
+                      <a:r>
+                        <a:rPr lang="ko-KR" dirty="0" err="1"/>
+                        <a:t>B</a:t>
+                      </a:r>
+                      <a:r>
+                        <a:rPr lang="ko-KR" dirty="0"/>
+                        <a:t>)) 계산</a:t>
+                      </a:r>
+                    </a:p>
+                  </a:txBody>
+                  <a:tcPr anchor="ctr"/>
+                </a:tc>
+                <a:extLst>
+                  <a:ext uri="{0D108BD9-81ED-4DB2-BD59-A6C34878D82A}">
+                    <a16:rowId xmlns:a16="http://schemas.microsoft.com/office/drawing/2014/main" val="4118191285"/>
+                  </a:ext>
+                </a:extLst>
+              </a:tr>
+              <a:tr h="370840">
+                <a:tc>
+                  <a:txBody>
+                    <a:bodyPr/>
+                    <a:lstStyle/>
+                    <a:p>
+                      <a:pPr algn="ctr">
+                        <a:buNone/>
+                      </a:pPr>
+                      <a:r>
+                        <a:rPr lang="ko-KR"/>
+                        <a:t>사용처</a:t>
+                      </a:r>
+                    </a:p>
+                  </a:txBody>
+                  <a:tcPr anchor="ctr"/>
+                </a:tc>
+                <a:tc>
+                  <a:txBody>
+                    <a:bodyPr/>
+                    <a:lstStyle/>
+                    <a:p>
+                      <a:pPr algn="ctr">
+                        <a:buNone/>
+                      </a:pPr>
+                      <a:r>
+                        <a:rPr lang="ko-KR" dirty="0"/>
+                        <a:t>통계 전반</a:t>
+                      </a:r>
+                    </a:p>
+                  </a:txBody>
+                  <a:tcPr anchor="ctr"/>
+                </a:tc>
+                <a:tc>
+                  <a:txBody>
+                    <a:bodyPr/>
+                    <a:lstStyle/>
+                    <a:p>
+                      <a:pPr algn="ctr">
+                        <a:buNone/>
+                      </a:pPr>
+                      <a:r>
+                        <a:rPr lang="ko-KR" dirty="0"/>
+                        <a:t>텍스트 분류, 스팸 필터</a:t>
+                      </a:r>
+                    </a:p>
+                  </a:txBody>
+                  <a:tcPr anchor="ctr"/>
+                </a:tc>
+                <a:extLst>
+                  <a:ext uri="{0D108BD9-81ED-4DB2-BD59-A6C34878D82A}">
+                    <a16:rowId xmlns:a16="http://schemas.microsoft.com/office/drawing/2014/main" val="3325759853"/>
+                  </a:ext>
+                </a:extLst>
+              </a:tr>
+            </a:tbl>
+          </a:graphicData>
+        </a:graphic>
+      </p:graphicFrame>
+    </p:spTree>
+    <p:extLst>
+      <p:ext uri="{BB962C8B-B14F-4D97-AF65-F5344CB8AC3E}">
+        <p14:creationId xmlns:p14="http://schemas.microsoft.com/office/powerpoint/2010/main" val="443843157"/>
       </p:ext>
     </p:extLst>
   </p:cSld>
@@ -36137,6 +37065,320 @@
     <p:extLst>
       <p:ext uri="{BB962C8B-B14F-4D97-AF65-F5344CB8AC3E}">
         <p14:creationId xmlns:p14="http://schemas.microsoft.com/office/powerpoint/2010/main" val="3374901976"/>
+      </p:ext>
+    </p:extLst>
+  </p:cSld>
+  <p:clrMapOvr>
+    <a:masterClrMapping/>
+  </p:clrMapOvr>
+</p:sld>
+</file>
+
+<file path=ppt/slides/slide50.xml><?xml version="1.0" encoding="utf-8"?>
+<p:sld xmlns:a="http://schemas.openxmlformats.org/drawingml/2006/main" xmlns:r="http://schemas.openxmlformats.org/officeDocument/2006/relationships" xmlns:p="http://schemas.openxmlformats.org/presentationml/2006/main">
+  <p:cSld>
+    <p:spTree>
+      <p:nvGrpSpPr>
+        <p:cNvPr id="1" name="">
+          <a:extLst>
+            <a:ext uri="{FF2B5EF4-FFF2-40B4-BE49-F238E27FC236}">
+              <a16:creationId xmlns:a16="http://schemas.microsoft.com/office/drawing/2014/main" id="{9B2048FF-2D62-3628-8BB5-1C0663D1C789}"/>
+            </a:ext>
+          </a:extLst>
+        </p:cNvPr>
+        <p:cNvGrpSpPr/>
+        <p:nvPr/>
+      </p:nvGrpSpPr>
+      <p:grpSpPr>
+        <a:xfrm>
+          <a:off x="0" y="0"/>
+          <a:ext cx="0" cy="0"/>
+          <a:chOff x="0" y="0"/>
+          <a:chExt cx="0" cy="0"/>
+        </a:xfrm>
+      </p:grpSpPr>
+      <p:sp>
+        <p:nvSpPr>
+          <p:cNvPr id="2" name="TextBox 1">
+            <a:extLst>
+              <a:ext uri="{FF2B5EF4-FFF2-40B4-BE49-F238E27FC236}">
+                <a16:creationId xmlns:a16="http://schemas.microsoft.com/office/drawing/2014/main" id="{798109D3-2FB7-6D58-3980-E853DCC9C180}"/>
+              </a:ext>
+            </a:extLst>
+          </p:cNvPr>
+          <p:cNvSpPr txBox="1"/>
+          <p:nvPr/>
+        </p:nvSpPr>
+        <p:spPr>
+          <a:xfrm>
+            <a:off x="1473199" y="375920"/>
+            <a:ext cx="9347200" cy="646331"/>
+          </a:xfrm>
+          <a:prstGeom prst="rect">
+            <a:avLst/>
+          </a:prstGeom>
+          <a:noFill/>
+        </p:spPr>
+        <p:txBody>
+          <a:bodyPr wrap="square" rtlCol="0">
+            <a:spAutoFit/>
+          </a:bodyPr>
+          <a:lstStyle/>
+          <a:p>
+            <a:pPr marL="0" marR="0" lvl="0" indent="0" algn="l" defTabSz="914400" rtl="0" eaLnBrk="1" fontAlgn="auto" latinLnBrk="1" hangingPunct="1">
+              <a:lnSpc>
+                <a:spcPct val="100000"/>
+              </a:lnSpc>
+              <a:spcBef>
+                <a:spcPts val="0"/>
+              </a:spcBef>
+              <a:spcAft>
+                <a:spcPts val="0"/>
+              </a:spcAft>
+              <a:buClrTx/>
+              <a:buSzTx/>
+              <a:buFontTx/>
+              <a:buNone/>
+              <a:tabLst/>
+              <a:defRPr/>
+            </a:pPr>
+            <a:r>
+              <a:rPr lang="ko-KR" altLang="en-US" sz="3600" dirty="0" err="1">
+                <a:solidFill>
+                  <a:prstClr val="white"/>
+                </a:solidFill>
+                <a:latin typeface="나눔바른고딕" panose="020B0603020101020101" pitchFamily="50" charset="-127"/>
+                <a:ea typeface="나눔바른고딕" panose="020B0603020101020101" pitchFamily="50" charset="-127"/>
+              </a:rPr>
+              <a:t>나이브</a:t>
+            </a:r>
+            <a:r>
+              <a:rPr lang="ko-KR" altLang="en-US" sz="3600" dirty="0">
+                <a:solidFill>
+                  <a:prstClr val="white"/>
+                </a:solidFill>
+                <a:latin typeface="나눔바른고딕" panose="020B0603020101020101" pitchFamily="50" charset="-127"/>
+                <a:ea typeface="나눔바른고딕" panose="020B0603020101020101" pitchFamily="50" charset="-127"/>
+              </a:rPr>
+              <a:t> </a:t>
+            </a:r>
+            <a:r>
+              <a:rPr lang="ko-KR" altLang="en-US" sz="3600" dirty="0" err="1">
+                <a:solidFill>
+                  <a:prstClr val="white"/>
+                </a:solidFill>
+                <a:latin typeface="나눔바른고딕" panose="020B0603020101020101" pitchFamily="50" charset="-127"/>
+                <a:ea typeface="나눔바른고딕" panose="020B0603020101020101" pitchFamily="50" charset="-127"/>
+              </a:rPr>
+              <a:t>베이즈안</a:t>
+            </a:r>
+            <a:r>
+              <a:rPr lang="ko-KR" altLang="en-US" sz="3600" dirty="0">
+                <a:solidFill>
+                  <a:prstClr val="white"/>
+                </a:solidFill>
+                <a:latin typeface="나눔바른고딕" panose="020B0603020101020101" pitchFamily="50" charset="-127"/>
+                <a:ea typeface="나눔바른고딕" panose="020B0603020101020101" pitchFamily="50" charset="-127"/>
+              </a:rPr>
+              <a:t> 알고리즘</a:t>
+            </a:r>
+            <a:endParaRPr kumimoji="0" lang="ko-KR" altLang="en-US" sz="1800" b="0" i="0" u="none" strike="noStrike" kern="1200" cap="none" spc="0" normalizeH="0" baseline="0" noProof="0" dirty="0">
+              <a:ln>
+                <a:noFill/>
+              </a:ln>
+              <a:solidFill>
+                <a:prstClr val="white"/>
+              </a:solidFill>
+              <a:effectLst/>
+              <a:uLnTx/>
+              <a:uFillTx/>
+              <a:latin typeface="나눔바른고딕" panose="020B0603020101020101" pitchFamily="50" charset="-127"/>
+              <a:ea typeface="나눔바른고딕" panose="020B0603020101020101" pitchFamily="50" charset="-127"/>
+              <a:cs typeface="+mn-cs"/>
+            </a:endParaRPr>
+          </a:p>
+        </p:txBody>
+      </p:sp>
+      <p:grpSp>
+        <p:nvGrpSpPr>
+          <p:cNvPr id="24" name="그룹 23">
+            <a:extLst>
+              <a:ext uri="{FF2B5EF4-FFF2-40B4-BE49-F238E27FC236}">
+                <a16:creationId xmlns:a16="http://schemas.microsoft.com/office/drawing/2014/main" id="{DA667EBD-A026-F68F-BCA6-7CF4EA3CCF3E}"/>
+              </a:ext>
+            </a:extLst>
+          </p:cNvPr>
+          <p:cNvGrpSpPr/>
+          <p:nvPr/>
+        </p:nvGrpSpPr>
+        <p:grpSpPr>
+          <a:xfrm>
+            <a:off x="10971530" y="345440"/>
+            <a:ext cx="1332231" cy="863600"/>
+            <a:chOff x="10971530" y="345440"/>
+            <a:chExt cx="1332231" cy="863600"/>
+          </a:xfrm>
+        </p:grpSpPr>
+        <p:pic>
+          <p:nvPicPr>
+            <p:cNvPr id="22" name="그림 21">
+              <a:extLst>
+                <a:ext uri="{FF2B5EF4-FFF2-40B4-BE49-F238E27FC236}">
+                  <a16:creationId xmlns:a16="http://schemas.microsoft.com/office/drawing/2014/main" id="{C7B794D5-FD60-822F-D9D1-340CCA8C5267}"/>
+                </a:ext>
+              </a:extLst>
+            </p:cNvPr>
+            <p:cNvPicPr>
+              <a:picLocks noChangeAspect="1"/>
+            </p:cNvPicPr>
+            <p:nvPr/>
+          </p:nvPicPr>
+          <p:blipFill>
+            <a:blip r:embed="rId3" cstate="print">
+              <a:extLst>
+                <a:ext uri="{28A0092B-C50C-407E-A947-70E740481C1C}">
+                  <a14:useLocalDpi xmlns:a14="http://schemas.microsoft.com/office/drawing/2010/main" val="0"/>
+                </a:ext>
+              </a:extLst>
+            </a:blip>
+            <a:stretch>
+              <a:fillRect/>
+            </a:stretch>
+          </p:blipFill>
+          <p:spPr>
+            <a:xfrm>
+              <a:off x="11008361" y="345440"/>
+              <a:ext cx="1295400" cy="863600"/>
+            </a:xfrm>
+            <a:prstGeom prst="rect">
+              <a:avLst/>
+            </a:prstGeom>
+            <a:effectLst>
+              <a:outerShdw sx="1000" sy="1000" algn="ctr" rotWithShape="0">
+                <a:srgbClr val="000000"/>
+              </a:outerShdw>
+              <a:reflection endPos="0" dir="5400000" sy="-100000" algn="bl" rotWithShape="0"/>
+            </a:effectLst>
+          </p:spPr>
+        </p:pic>
+        <p:sp>
+          <p:nvSpPr>
+            <p:cNvPr id="23" name="직사각형 22">
+              <a:extLst>
+                <a:ext uri="{FF2B5EF4-FFF2-40B4-BE49-F238E27FC236}">
+                  <a16:creationId xmlns:a16="http://schemas.microsoft.com/office/drawing/2014/main" id="{FC28C1E4-3C45-6681-FE9E-5FD928565EDB}"/>
+                </a:ext>
+              </a:extLst>
+            </p:cNvPr>
+            <p:cNvSpPr/>
+            <p:nvPr/>
+          </p:nvSpPr>
+          <p:spPr>
+            <a:xfrm>
+              <a:off x="10971530" y="375919"/>
+              <a:ext cx="1181100" cy="646331"/>
+            </a:xfrm>
+            <a:prstGeom prst="rect">
+              <a:avLst/>
+            </a:prstGeom>
+            <a:solidFill>
+              <a:schemeClr val="accent1">
+                <a:alpha val="50000"/>
+              </a:schemeClr>
+            </a:solidFill>
+            <a:ln>
+              <a:noFill/>
+            </a:ln>
+          </p:spPr>
+          <p:style>
+            <a:lnRef idx="2">
+              <a:schemeClr val="accent1">
+                <a:shade val="50000"/>
+              </a:schemeClr>
+            </a:lnRef>
+            <a:fillRef idx="1">
+              <a:schemeClr val="accent1"/>
+            </a:fillRef>
+            <a:effectRef idx="0">
+              <a:schemeClr val="accent1"/>
+            </a:effectRef>
+            <a:fontRef idx="minor">
+              <a:schemeClr val="lt1"/>
+            </a:fontRef>
+          </p:style>
+          <p:txBody>
+            <a:bodyPr rtlCol="0" anchor="ctr"/>
+            <a:lstStyle/>
+            <a:p>
+              <a:pPr marL="0" marR="0" lvl="0" indent="0" algn="ctr" defTabSz="914400" rtl="0" eaLnBrk="1" fontAlgn="auto" latinLnBrk="1" hangingPunct="1">
+                <a:lnSpc>
+                  <a:spcPct val="100000"/>
+                </a:lnSpc>
+                <a:spcBef>
+                  <a:spcPts val="0"/>
+                </a:spcBef>
+                <a:spcAft>
+                  <a:spcPts val="0"/>
+                </a:spcAft>
+                <a:buClrTx/>
+                <a:buSzTx/>
+                <a:buFontTx/>
+                <a:buNone/>
+                <a:tabLst/>
+                <a:defRPr/>
+              </a:pPr>
+              <a:endParaRPr kumimoji="0" lang="ko-KR" altLang="en-US" sz="1800" b="0" i="0" u="none" strike="noStrike" kern="1200" cap="none" spc="0" normalizeH="0" baseline="0" noProof="0">
+                <a:ln>
+                  <a:noFill/>
+                </a:ln>
+                <a:solidFill>
+                  <a:prstClr val="white"/>
+                </a:solidFill>
+                <a:effectLst/>
+                <a:uLnTx/>
+                <a:uFillTx/>
+                <a:latin typeface="나눔바른고딕 Light"/>
+                <a:ea typeface="맑은 고딕"/>
+                <a:cs typeface="+mn-cs"/>
+              </a:endParaRPr>
+            </a:p>
+          </p:txBody>
+        </p:sp>
+      </p:grpSp>
+      <p:pic>
+        <p:nvPicPr>
+          <p:cNvPr id="4" name="그림 3">
+            <a:extLst>
+              <a:ext uri="{FF2B5EF4-FFF2-40B4-BE49-F238E27FC236}">
+                <a16:creationId xmlns:a16="http://schemas.microsoft.com/office/drawing/2014/main" id="{8FA02CEC-932D-1C51-8781-BADC6BA3F9EF}"/>
+              </a:ext>
+            </a:extLst>
+          </p:cNvPr>
+          <p:cNvPicPr>
+            <a:picLocks noChangeAspect="1"/>
+          </p:cNvPicPr>
+          <p:nvPr/>
+        </p:nvPicPr>
+        <p:blipFill>
+          <a:blip r:embed="rId4"/>
+          <a:stretch>
+            <a:fillRect/>
+          </a:stretch>
+        </p:blipFill>
+        <p:spPr>
+          <a:xfrm>
+            <a:off x="302396" y="1558839"/>
+            <a:ext cx="11688806" cy="4725059"/>
+          </a:xfrm>
+          <a:prstGeom prst="rect">
+            <a:avLst/>
+          </a:prstGeom>
+        </p:spPr>
+      </p:pic>
+    </p:spTree>
+    <p:extLst>
+      <p:ext uri="{BB962C8B-B14F-4D97-AF65-F5344CB8AC3E}">
+        <p14:creationId xmlns:p14="http://schemas.microsoft.com/office/powerpoint/2010/main" val="474144776"/>
       </p:ext>
     </p:extLst>
   </p:cSld>

--- a/머신러닝-유형/AI-딥러닝을위한-수학공식.pptx
+++ b/머신러닝-유형/AI-딥러닝을위한-수학공식.pptx
@@ -5,7 +5,7 @@
     <p:sldMasterId id="2147483648" r:id="rId1"/>
   </p:sldMasterIdLst>
   <p:notesMasterIdLst>
-    <p:notesMasterId r:id="rId52"/>
+    <p:notesMasterId r:id="rId53"/>
   </p:notesMasterIdLst>
   <p:sldIdLst>
     <p:sldId id="256" r:id="rId2"/>
@@ -58,6 +58,7 @@
     <p:sldId id="383" r:id="rId49"/>
     <p:sldId id="384" r:id="rId50"/>
     <p:sldId id="385" r:id="rId51"/>
+    <p:sldId id="386" r:id="rId52"/>
   </p:sldIdLst>
   <p:sldSz cx="12192000" cy="6858000"/>
   <p:notesSz cx="6858000" cy="9144000"/>
@@ -3859,6 +3860,114 @@
     <p:extLst>
       <p:ext uri="{BB962C8B-B14F-4D97-AF65-F5344CB8AC3E}">
         <p14:creationId xmlns:p14="http://schemas.microsoft.com/office/powerpoint/2010/main" val="2579930635"/>
+      </p:ext>
+    </p:extLst>
+  </p:cSld>
+  <p:clrMapOvr>
+    <a:masterClrMapping/>
+  </p:clrMapOvr>
+</p:notes>
+</file>
+
+<file path=ppt/notesSlides/notesSlide40.xml><?xml version="1.0" encoding="utf-8"?>
+<p:notes xmlns:a="http://schemas.openxmlformats.org/drawingml/2006/main" xmlns:r="http://schemas.openxmlformats.org/officeDocument/2006/relationships" xmlns:p="http://schemas.openxmlformats.org/presentationml/2006/main">
+  <p:cSld>
+    <p:spTree>
+      <p:nvGrpSpPr>
+        <p:cNvPr id="1" name="">
+          <a:extLst>
+            <a:ext uri="{FF2B5EF4-FFF2-40B4-BE49-F238E27FC236}">
+              <a16:creationId xmlns:a16="http://schemas.microsoft.com/office/drawing/2014/main" id="{700CB558-B68A-67A3-3512-1055BD85A32F}"/>
+            </a:ext>
+          </a:extLst>
+        </p:cNvPr>
+        <p:cNvGrpSpPr/>
+        <p:nvPr/>
+      </p:nvGrpSpPr>
+      <p:grpSpPr>
+        <a:xfrm>
+          <a:off x="0" y="0"/>
+          <a:ext cx="0" cy="0"/>
+          <a:chOff x="0" y="0"/>
+          <a:chExt cx="0" cy="0"/>
+        </a:xfrm>
+      </p:grpSpPr>
+      <p:sp>
+        <p:nvSpPr>
+          <p:cNvPr id="2" name="슬라이드 이미지 개체 틀 1">
+            <a:extLst>
+              <a:ext uri="{FF2B5EF4-FFF2-40B4-BE49-F238E27FC236}">
+                <a16:creationId xmlns:a16="http://schemas.microsoft.com/office/drawing/2014/main" id="{A8622E67-C301-E02D-43B6-5BEE1B46BC86}"/>
+              </a:ext>
+            </a:extLst>
+          </p:cNvPr>
+          <p:cNvSpPr>
+            <a:spLocks noGrp="1" noRot="1" noChangeAspect="1"/>
+          </p:cNvSpPr>
+          <p:nvPr>
+            <p:ph type="sldImg"/>
+          </p:nvPr>
+        </p:nvSpPr>
+        <p:spPr/>
+      </p:sp>
+      <p:sp>
+        <p:nvSpPr>
+          <p:cNvPr id="3" name="슬라이드 노트 개체 틀 2">
+            <a:extLst>
+              <a:ext uri="{FF2B5EF4-FFF2-40B4-BE49-F238E27FC236}">
+                <a16:creationId xmlns:a16="http://schemas.microsoft.com/office/drawing/2014/main" id="{70F0AFE4-C4AE-4EBC-D3BA-101C2A4085CE}"/>
+              </a:ext>
+            </a:extLst>
+          </p:cNvPr>
+          <p:cNvSpPr>
+            <a:spLocks noGrp="1"/>
+          </p:cNvSpPr>
+          <p:nvPr>
+            <p:ph type="body" idx="1"/>
+          </p:nvPr>
+        </p:nvSpPr>
+        <p:spPr/>
+        <p:txBody>
+          <a:bodyPr/>
+          <a:lstStyle/>
+          <a:p>
+            <a:endParaRPr lang="ko-KR" altLang="en-US" dirty="0"/>
+          </a:p>
+        </p:txBody>
+      </p:sp>
+      <p:sp>
+        <p:nvSpPr>
+          <p:cNvPr id="4" name="슬라이드 번호 개체 틀 3">
+            <a:extLst>
+              <a:ext uri="{FF2B5EF4-FFF2-40B4-BE49-F238E27FC236}">
+                <a16:creationId xmlns:a16="http://schemas.microsoft.com/office/drawing/2014/main" id="{7F7A2428-0FA7-D95F-DE08-6880499D3C4C}"/>
+              </a:ext>
+            </a:extLst>
+          </p:cNvPr>
+          <p:cNvSpPr>
+            <a:spLocks noGrp="1"/>
+          </p:cNvSpPr>
+          <p:nvPr>
+            <p:ph type="sldNum" sz="quarter" idx="5"/>
+          </p:nvPr>
+        </p:nvSpPr>
+        <p:spPr/>
+        <p:txBody>
+          <a:bodyPr/>
+          <a:lstStyle/>
+          <a:p>
+            <a:fld id="{353DFDED-2E9F-41DA-A9FA-780DFF41939C}" type="slidenum">
+              <a:rPr lang="ko-KR" altLang="en-US" smtClean="0"/>
+              <a:t>51</a:t>
+            </a:fld>
+            <a:endParaRPr lang="ko-KR" altLang="en-US"/>
+          </a:p>
+        </p:txBody>
+      </p:sp>
+    </p:spTree>
+    <p:extLst>
+      <p:ext uri="{BB962C8B-B14F-4D97-AF65-F5344CB8AC3E}">
+        <p14:creationId xmlns:p14="http://schemas.microsoft.com/office/powerpoint/2010/main" val="555808211"/>
       </p:ext>
     </p:extLst>
   </p:cSld>
@@ -37347,10 +37456,10 @@
       </p:grpSp>
       <p:pic>
         <p:nvPicPr>
-          <p:cNvPr id="4" name="그림 3">
+          <p:cNvPr id="5" name="그림 4">
             <a:extLst>
               <a:ext uri="{FF2B5EF4-FFF2-40B4-BE49-F238E27FC236}">
-                <a16:creationId xmlns:a16="http://schemas.microsoft.com/office/drawing/2014/main" id="{8FA02CEC-932D-1C51-8781-BADC6BA3F9EF}"/>
+                <a16:creationId xmlns:a16="http://schemas.microsoft.com/office/drawing/2014/main" id="{A1840829-E1CF-EDC8-FC94-45035D932DE6}"/>
               </a:ext>
             </a:extLst>
           </p:cNvPr>
@@ -37367,8 +37476,8 @@
         </p:blipFill>
         <p:spPr>
           <a:xfrm>
-            <a:off x="302396" y="1558839"/>
-            <a:ext cx="11688806" cy="4725059"/>
+            <a:off x="55456" y="1952624"/>
+            <a:ext cx="12136544" cy="4153480"/>
           </a:xfrm>
           <a:prstGeom prst="rect">
             <a:avLst/>
@@ -37379,6 +37488,320 @@
     <p:extLst>
       <p:ext uri="{BB962C8B-B14F-4D97-AF65-F5344CB8AC3E}">
         <p14:creationId xmlns:p14="http://schemas.microsoft.com/office/powerpoint/2010/main" val="474144776"/>
+      </p:ext>
+    </p:extLst>
+  </p:cSld>
+  <p:clrMapOvr>
+    <a:masterClrMapping/>
+  </p:clrMapOvr>
+</p:sld>
+</file>
+
+<file path=ppt/slides/slide51.xml><?xml version="1.0" encoding="utf-8"?>
+<p:sld xmlns:a="http://schemas.openxmlformats.org/drawingml/2006/main" xmlns:r="http://schemas.openxmlformats.org/officeDocument/2006/relationships" xmlns:p="http://schemas.openxmlformats.org/presentationml/2006/main">
+  <p:cSld>
+    <p:spTree>
+      <p:nvGrpSpPr>
+        <p:cNvPr id="1" name="">
+          <a:extLst>
+            <a:ext uri="{FF2B5EF4-FFF2-40B4-BE49-F238E27FC236}">
+              <a16:creationId xmlns:a16="http://schemas.microsoft.com/office/drawing/2014/main" id="{45B06448-7321-2D18-F471-BE0959B9390A}"/>
+            </a:ext>
+          </a:extLst>
+        </p:cNvPr>
+        <p:cNvGrpSpPr/>
+        <p:nvPr/>
+      </p:nvGrpSpPr>
+      <p:grpSpPr>
+        <a:xfrm>
+          <a:off x="0" y="0"/>
+          <a:ext cx="0" cy="0"/>
+          <a:chOff x="0" y="0"/>
+          <a:chExt cx="0" cy="0"/>
+        </a:xfrm>
+      </p:grpSpPr>
+      <p:sp>
+        <p:nvSpPr>
+          <p:cNvPr id="2" name="TextBox 1">
+            <a:extLst>
+              <a:ext uri="{FF2B5EF4-FFF2-40B4-BE49-F238E27FC236}">
+                <a16:creationId xmlns:a16="http://schemas.microsoft.com/office/drawing/2014/main" id="{565D7BEC-2B5E-8B02-4FAE-9AE119A1F5CF}"/>
+              </a:ext>
+            </a:extLst>
+          </p:cNvPr>
+          <p:cNvSpPr txBox="1"/>
+          <p:nvPr/>
+        </p:nvSpPr>
+        <p:spPr>
+          <a:xfrm>
+            <a:off x="1473199" y="375920"/>
+            <a:ext cx="9347200" cy="646331"/>
+          </a:xfrm>
+          <a:prstGeom prst="rect">
+            <a:avLst/>
+          </a:prstGeom>
+          <a:noFill/>
+        </p:spPr>
+        <p:txBody>
+          <a:bodyPr wrap="square" rtlCol="0">
+            <a:spAutoFit/>
+          </a:bodyPr>
+          <a:lstStyle/>
+          <a:p>
+            <a:pPr marL="0" marR="0" lvl="0" indent="0" algn="l" defTabSz="914400" rtl="0" eaLnBrk="1" fontAlgn="auto" latinLnBrk="1" hangingPunct="1">
+              <a:lnSpc>
+                <a:spcPct val="100000"/>
+              </a:lnSpc>
+              <a:spcBef>
+                <a:spcPts val="0"/>
+              </a:spcBef>
+              <a:spcAft>
+                <a:spcPts val="0"/>
+              </a:spcAft>
+              <a:buClrTx/>
+              <a:buSzTx/>
+              <a:buFontTx/>
+              <a:buNone/>
+              <a:tabLst/>
+              <a:defRPr/>
+            </a:pPr>
+            <a:r>
+              <a:rPr lang="ko-KR" altLang="en-US" sz="3600" dirty="0" err="1">
+                <a:solidFill>
+                  <a:prstClr val="white"/>
+                </a:solidFill>
+                <a:latin typeface="나눔바른고딕" panose="020B0603020101020101" pitchFamily="50" charset="-127"/>
+                <a:ea typeface="나눔바른고딕" panose="020B0603020101020101" pitchFamily="50" charset="-127"/>
+              </a:rPr>
+              <a:t>나이브</a:t>
+            </a:r>
+            <a:r>
+              <a:rPr lang="ko-KR" altLang="en-US" sz="3600" dirty="0">
+                <a:solidFill>
+                  <a:prstClr val="white"/>
+                </a:solidFill>
+                <a:latin typeface="나눔바른고딕" panose="020B0603020101020101" pitchFamily="50" charset="-127"/>
+                <a:ea typeface="나눔바른고딕" panose="020B0603020101020101" pitchFamily="50" charset="-127"/>
+              </a:rPr>
+              <a:t> </a:t>
+            </a:r>
+            <a:r>
+              <a:rPr lang="ko-KR" altLang="en-US" sz="3600" dirty="0" err="1">
+                <a:solidFill>
+                  <a:prstClr val="white"/>
+                </a:solidFill>
+                <a:latin typeface="나눔바른고딕" panose="020B0603020101020101" pitchFamily="50" charset="-127"/>
+                <a:ea typeface="나눔바른고딕" panose="020B0603020101020101" pitchFamily="50" charset="-127"/>
+              </a:rPr>
+              <a:t>베이즈안</a:t>
+            </a:r>
+            <a:r>
+              <a:rPr lang="ko-KR" altLang="en-US" sz="3600" dirty="0">
+                <a:solidFill>
+                  <a:prstClr val="white"/>
+                </a:solidFill>
+                <a:latin typeface="나눔바른고딕" panose="020B0603020101020101" pitchFamily="50" charset="-127"/>
+                <a:ea typeface="나눔바른고딕" panose="020B0603020101020101" pitchFamily="50" charset="-127"/>
+              </a:rPr>
+              <a:t> 알고리즘</a:t>
+            </a:r>
+            <a:endParaRPr kumimoji="0" lang="ko-KR" altLang="en-US" sz="1800" b="0" i="0" u="none" strike="noStrike" kern="1200" cap="none" spc="0" normalizeH="0" baseline="0" noProof="0" dirty="0">
+              <a:ln>
+                <a:noFill/>
+              </a:ln>
+              <a:solidFill>
+                <a:prstClr val="white"/>
+              </a:solidFill>
+              <a:effectLst/>
+              <a:uLnTx/>
+              <a:uFillTx/>
+              <a:latin typeface="나눔바른고딕" panose="020B0603020101020101" pitchFamily="50" charset="-127"/>
+              <a:ea typeface="나눔바른고딕" panose="020B0603020101020101" pitchFamily="50" charset="-127"/>
+              <a:cs typeface="+mn-cs"/>
+            </a:endParaRPr>
+          </a:p>
+        </p:txBody>
+      </p:sp>
+      <p:grpSp>
+        <p:nvGrpSpPr>
+          <p:cNvPr id="24" name="그룹 23">
+            <a:extLst>
+              <a:ext uri="{FF2B5EF4-FFF2-40B4-BE49-F238E27FC236}">
+                <a16:creationId xmlns:a16="http://schemas.microsoft.com/office/drawing/2014/main" id="{9F4181F6-5E60-D1DC-970E-D3117EC0678F}"/>
+              </a:ext>
+            </a:extLst>
+          </p:cNvPr>
+          <p:cNvGrpSpPr/>
+          <p:nvPr/>
+        </p:nvGrpSpPr>
+        <p:grpSpPr>
+          <a:xfrm>
+            <a:off x="10971530" y="345440"/>
+            <a:ext cx="1332231" cy="863600"/>
+            <a:chOff x="10971530" y="345440"/>
+            <a:chExt cx="1332231" cy="863600"/>
+          </a:xfrm>
+        </p:grpSpPr>
+        <p:pic>
+          <p:nvPicPr>
+            <p:cNvPr id="22" name="그림 21">
+              <a:extLst>
+                <a:ext uri="{FF2B5EF4-FFF2-40B4-BE49-F238E27FC236}">
+                  <a16:creationId xmlns:a16="http://schemas.microsoft.com/office/drawing/2014/main" id="{7807F456-E0AF-4994-E4C1-80A5E517F4E9}"/>
+                </a:ext>
+              </a:extLst>
+            </p:cNvPr>
+            <p:cNvPicPr>
+              <a:picLocks noChangeAspect="1"/>
+            </p:cNvPicPr>
+            <p:nvPr/>
+          </p:nvPicPr>
+          <p:blipFill>
+            <a:blip r:embed="rId3" cstate="print">
+              <a:extLst>
+                <a:ext uri="{28A0092B-C50C-407E-A947-70E740481C1C}">
+                  <a14:useLocalDpi xmlns:a14="http://schemas.microsoft.com/office/drawing/2010/main" val="0"/>
+                </a:ext>
+              </a:extLst>
+            </a:blip>
+            <a:stretch>
+              <a:fillRect/>
+            </a:stretch>
+          </p:blipFill>
+          <p:spPr>
+            <a:xfrm>
+              <a:off x="11008361" y="345440"/>
+              <a:ext cx="1295400" cy="863600"/>
+            </a:xfrm>
+            <a:prstGeom prst="rect">
+              <a:avLst/>
+            </a:prstGeom>
+            <a:effectLst>
+              <a:outerShdw sx="1000" sy="1000" algn="ctr" rotWithShape="0">
+                <a:srgbClr val="000000"/>
+              </a:outerShdw>
+              <a:reflection endPos="0" dir="5400000" sy="-100000" algn="bl" rotWithShape="0"/>
+            </a:effectLst>
+          </p:spPr>
+        </p:pic>
+        <p:sp>
+          <p:nvSpPr>
+            <p:cNvPr id="23" name="직사각형 22">
+              <a:extLst>
+                <a:ext uri="{FF2B5EF4-FFF2-40B4-BE49-F238E27FC236}">
+                  <a16:creationId xmlns:a16="http://schemas.microsoft.com/office/drawing/2014/main" id="{F1934CC8-F087-00B8-5A83-3E3D0343263E}"/>
+                </a:ext>
+              </a:extLst>
+            </p:cNvPr>
+            <p:cNvSpPr/>
+            <p:nvPr/>
+          </p:nvSpPr>
+          <p:spPr>
+            <a:xfrm>
+              <a:off x="10971530" y="375919"/>
+              <a:ext cx="1181100" cy="646331"/>
+            </a:xfrm>
+            <a:prstGeom prst="rect">
+              <a:avLst/>
+            </a:prstGeom>
+            <a:solidFill>
+              <a:schemeClr val="accent1">
+                <a:alpha val="50000"/>
+              </a:schemeClr>
+            </a:solidFill>
+            <a:ln>
+              <a:noFill/>
+            </a:ln>
+          </p:spPr>
+          <p:style>
+            <a:lnRef idx="2">
+              <a:schemeClr val="accent1">
+                <a:shade val="50000"/>
+              </a:schemeClr>
+            </a:lnRef>
+            <a:fillRef idx="1">
+              <a:schemeClr val="accent1"/>
+            </a:fillRef>
+            <a:effectRef idx="0">
+              <a:schemeClr val="accent1"/>
+            </a:effectRef>
+            <a:fontRef idx="minor">
+              <a:schemeClr val="lt1"/>
+            </a:fontRef>
+          </p:style>
+          <p:txBody>
+            <a:bodyPr rtlCol="0" anchor="ctr"/>
+            <a:lstStyle/>
+            <a:p>
+              <a:pPr marL="0" marR="0" lvl="0" indent="0" algn="ctr" defTabSz="914400" rtl="0" eaLnBrk="1" fontAlgn="auto" latinLnBrk="1" hangingPunct="1">
+                <a:lnSpc>
+                  <a:spcPct val="100000"/>
+                </a:lnSpc>
+                <a:spcBef>
+                  <a:spcPts val="0"/>
+                </a:spcBef>
+                <a:spcAft>
+                  <a:spcPts val="0"/>
+                </a:spcAft>
+                <a:buClrTx/>
+                <a:buSzTx/>
+                <a:buFontTx/>
+                <a:buNone/>
+                <a:tabLst/>
+                <a:defRPr/>
+              </a:pPr>
+              <a:endParaRPr kumimoji="0" lang="ko-KR" altLang="en-US" sz="1800" b="0" i="0" u="none" strike="noStrike" kern="1200" cap="none" spc="0" normalizeH="0" baseline="0" noProof="0">
+                <a:ln>
+                  <a:noFill/>
+                </a:ln>
+                <a:solidFill>
+                  <a:prstClr val="white"/>
+                </a:solidFill>
+                <a:effectLst/>
+                <a:uLnTx/>
+                <a:uFillTx/>
+                <a:latin typeface="나눔바른고딕 Light"/>
+                <a:ea typeface="맑은 고딕"/>
+                <a:cs typeface="+mn-cs"/>
+              </a:endParaRPr>
+            </a:p>
+          </p:txBody>
+        </p:sp>
+      </p:grpSp>
+      <p:pic>
+        <p:nvPicPr>
+          <p:cNvPr id="4" name="그림 3">
+            <a:extLst>
+              <a:ext uri="{FF2B5EF4-FFF2-40B4-BE49-F238E27FC236}">
+                <a16:creationId xmlns:a16="http://schemas.microsoft.com/office/drawing/2014/main" id="{71BA696F-5259-18E2-2C9A-683D978B57D9}"/>
+              </a:ext>
+            </a:extLst>
+          </p:cNvPr>
+          <p:cNvPicPr>
+            <a:picLocks noChangeAspect="1"/>
+          </p:cNvPicPr>
+          <p:nvPr/>
+        </p:nvPicPr>
+        <p:blipFill>
+          <a:blip r:embed="rId4"/>
+          <a:stretch>
+            <a:fillRect/>
+          </a:stretch>
+        </p:blipFill>
+        <p:spPr>
+          <a:xfrm>
+            <a:off x="302396" y="1558839"/>
+            <a:ext cx="11688806" cy="4725059"/>
+          </a:xfrm>
+          <a:prstGeom prst="rect">
+            <a:avLst/>
+          </a:prstGeom>
+        </p:spPr>
+      </p:pic>
+    </p:spTree>
+    <p:extLst>
+      <p:ext uri="{BB962C8B-B14F-4D97-AF65-F5344CB8AC3E}">
+        <p14:creationId xmlns:p14="http://schemas.microsoft.com/office/powerpoint/2010/main" val="4188276255"/>
       </p:ext>
     </p:extLst>
   </p:cSld>

--- a/머신러닝-유형/AI-딥러닝을위한-수학공식.pptx
+++ b/머신러닝-유형/AI-딥러닝을위한-수학공식.pptx
@@ -258,7 +258,7 @@
           <a:p>
             <a:fld id="{2419C5A5-FB7C-4404-8A54-1ABAD078A835}" type="datetimeFigureOut">
               <a:rPr lang="ko-KR" altLang="en-US" smtClean="0"/>
-              <a:t>2026-06-14</a:t>
+              <a:t>2026-06-22</a:t>
             </a:fld>
             <a:endParaRPr lang="ko-KR" altLang="en-US"/>
           </a:p>
@@ -5177,7 +5177,7 @@
                 <a:latin typeface="HY견고딕" panose="02030600000101010101" pitchFamily="18" charset="-127"/>
                 <a:ea typeface="HY견고딕" panose="02030600000101010101" pitchFamily="18" charset="-127"/>
               </a:rPr>
-              <a:t>머시러닝</a:t>
+              <a:t>머신러닝</a:t>
             </a:r>
             <a:r>
               <a:rPr lang="ko-KR" altLang="en-US" sz="4000" dirty="0">
